--- a/תכנון דפי הפרויקט.pptx
+++ b/תכנון דפי הפרויקט.pptx
@@ -268,7 +268,7 @@
           <a:p>
             <a:fld id="{BD9FA42A-C44C-4693-A6DC-EAF282B90AC0}" type="datetimeFigureOut">
               <a:rPr lang="he-IL" smtClean="0"/>
-              <a:t>ג'/טבת/תשפ"ו</a:t>
+              <a:t>י"ח/שבט/תשפ"ו</a:t>
             </a:fld>
             <a:endParaRPr lang="he-IL"/>
           </a:p>
@@ -466,7 +466,7 @@
           <a:p>
             <a:fld id="{BD9FA42A-C44C-4693-A6DC-EAF282B90AC0}" type="datetimeFigureOut">
               <a:rPr lang="he-IL" smtClean="0"/>
-              <a:t>ג'/טבת/תשפ"ו</a:t>
+              <a:t>י"ח/שבט/תשפ"ו</a:t>
             </a:fld>
             <a:endParaRPr lang="he-IL"/>
           </a:p>
@@ -674,7 +674,7 @@
           <a:p>
             <a:fld id="{BD9FA42A-C44C-4693-A6DC-EAF282B90AC0}" type="datetimeFigureOut">
               <a:rPr lang="he-IL" smtClean="0"/>
-              <a:t>ג'/טבת/תשפ"ו</a:t>
+              <a:t>י"ח/שבט/תשפ"ו</a:t>
             </a:fld>
             <a:endParaRPr lang="he-IL"/>
           </a:p>
@@ -872,7 +872,7 @@
           <a:p>
             <a:fld id="{BD9FA42A-C44C-4693-A6DC-EAF282B90AC0}" type="datetimeFigureOut">
               <a:rPr lang="he-IL" smtClean="0"/>
-              <a:t>ג'/טבת/תשפ"ו</a:t>
+              <a:t>י"ח/שבט/תשפ"ו</a:t>
             </a:fld>
             <a:endParaRPr lang="he-IL"/>
           </a:p>
@@ -1147,7 +1147,7 @@
           <a:p>
             <a:fld id="{BD9FA42A-C44C-4693-A6DC-EAF282B90AC0}" type="datetimeFigureOut">
               <a:rPr lang="he-IL" smtClean="0"/>
-              <a:t>ג'/טבת/תשפ"ו</a:t>
+              <a:t>י"ח/שבט/תשפ"ו</a:t>
             </a:fld>
             <a:endParaRPr lang="he-IL"/>
           </a:p>
@@ -1412,7 +1412,7 @@
           <a:p>
             <a:fld id="{BD9FA42A-C44C-4693-A6DC-EAF282B90AC0}" type="datetimeFigureOut">
               <a:rPr lang="he-IL" smtClean="0"/>
-              <a:t>ג'/טבת/תשפ"ו</a:t>
+              <a:t>י"ח/שבט/תשפ"ו</a:t>
             </a:fld>
             <a:endParaRPr lang="he-IL"/>
           </a:p>
@@ -1824,7 +1824,7 @@
           <a:p>
             <a:fld id="{BD9FA42A-C44C-4693-A6DC-EAF282B90AC0}" type="datetimeFigureOut">
               <a:rPr lang="he-IL" smtClean="0"/>
-              <a:t>ג'/טבת/תשפ"ו</a:t>
+              <a:t>י"ח/שבט/תשפ"ו</a:t>
             </a:fld>
             <a:endParaRPr lang="he-IL"/>
           </a:p>
@@ -1965,7 +1965,7 @@
           <a:p>
             <a:fld id="{BD9FA42A-C44C-4693-A6DC-EAF282B90AC0}" type="datetimeFigureOut">
               <a:rPr lang="he-IL" smtClean="0"/>
-              <a:t>ג'/טבת/תשפ"ו</a:t>
+              <a:t>י"ח/שבט/תשפ"ו</a:t>
             </a:fld>
             <a:endParaRPr lang="he-IL"/>
           </a:p>
@@ -2078,7 +2078,7 @@
           <a:p>
             <a:fld id="{BD9FA42A-C44C-4693-A6DC-EAF282B90AC0}" type="datetimeFigureOut">
               <a:rPr lang="he-IL" smtClean="0"/>
-              <a:t>ג'/טבת/תשפ"ו</a:t>
+              <a:t>י"ח/שבט/תשפ"ו</a:t>
             </a:fld>
             <a:endParaRPr lang="he-IL"/>
           </a:p>
@@ -2389,7 +2389,7 @@
           <a:p>
             <a:fld id="{BD9FA42A-C44C-4693-A6DC-EAF282B90AC0}" type="datetimeFigureOut">
               <a:rPr lang="he-IL" smtClean="0"/>
-              <a:t>ג'/טבת/תשפ"ו</a:t>
+              <a:t>י"ח/שבט/תשפ"ו</a:t>
             </a:fld>
             <a:endParaRPr lang="he-IL"/>
           </a:p>
@@ -2677,7 +2677,7 @@
           <a:p>
             <a:fld id="{BD9FA42A-C44C-4693-A6DC-EAF282B90AC0}" type="datetimeFigureOut">
               <a:rPr lang="he-IL" smtClean="0"/>
-              <a:t>ג'/טבת/תשפ"ו</a:t>
+              <a:t>י"ח/שבט/תשפ"ו</a:t>
             </a:fld>
             <a:endParaRPr lang="he-IL"/>
           </a:p>
@@ -2918,7 +2918,7 @@
           <a:p>
             <a:fld id="{BD9FA42A-C44C-4693-A6DC-EAF282B90AC0}" type="datetimeFigureOut">
               <a:rPr lang="he-IL" smtClean="0"/>
-              <a:t>ג'/טבת/תשפ"ו</a:t>
+              <a:t>י"ח/שבט/תשפ"ו</a:t>
             </a:fld>
             <a:endParaRPr lang="he-IL"/>
           </a:p>
@@ -4053,7 +4053,7 @@
             </a:pPr>
             <a:r>
               <a:rPr lang="he-IL" dirty="0"/>
-              <a:t>(מייד בכניסה לדף מוצגת רשימת המתנות)</a:t>
+              <a:t>(מייד בכניסה לדף מוצגת רשימת רכישות)</a:t>
             </a:r>
           </a:p>
           <a:p>
@@ -4071,16 +4071,15 @@
             </a:pPr>
             <a:r>
               <a:rPr lang="he-IL" dirty="0"/>
-              <a:t>לכל מתנה: כפתור המאפשר לצפות ברשימות הכרטיסים</a:t>
-            </a:r>
-          </a:p>
-          <a:p>
-            <a:pPr marL="0" indent="0">
-              <a:buNone/>
-            </a:pPr>
-            <a:r>
-              <a:rPr lang="he-IL" dirty="0"/>
-              <a:t>                     לכל כרטיס יש כפתור המאפשר  לצפות בפרטי הקונה </a:t>
+              <a:t>לכל רכישה</a:t>
+            </a:r>
+            <a:r>
+              <a:rPr lang="he-IL"/>
+              <a:t>: לכל </a:t>
+            </a:r>
+            <a:r>
+              <a:rPr lang="he-IL" dirty="0"/>
+              <a:t>כרטיס יש כפתור המאפשר  לצפות בפרטי הקונה </a:t>
             </a:r>
           </a:p>
         </p:txBody>
